--- a/data/employees/EMP067/AST-EMP067-01.pptx
+++ b/data/employees/EMP067/AST-EMP067-01.pptx
@@ -9,6 +9,7 @@
     <p:sldId id="257" r:id="rId8"/>
     <p:sldId id="258" r:id="rId9"/>
     <p:sldId id="259" r:id="rId10"/>
+    <p:sldId id="260" r:id="rId11"/>
   </p:sldIdLst>
   <p:sldSz cx="9144000" cy="6858000" type="screen4x3"/>
   <p:notesSz cx="6858000" cy="9144000"/>
@@ -3098,42 +3099,55 @@
             <a:spLocks noGrp="1"/>
           </p:cNvSpPr>
           <p:nvPr>
-            <p:ph type="ctrTitle"/>
-          </p:nvPr>
-        </p:nvSpPr>
-        <p:spPr/>
-        <p:txBody>
-          <a:bodyPr/>
-          <a:lstStyle/>
-          <a:p>
-            <a:r>
-              <a:t>Project update deck - EMP067</a:t>
-            </a:r>
-          </a:p>
-        </p:txBody>
-      </p:sp>
-      <p:sp>
-        <p:nvSpPr>
-          <p:cNvPr id="3" name="Subtitle 2"/>
-          <p:cNvSpPr>
-            <a:spLocks noGrp="1"/>
-          </p:cNvSpPr>
-          <p:nvPr>
-            <p:ph type="subTitle" idx="1"/>
-          </p:nvPr>
-        </p:nvSpPr>
-        <p:spPr/>
-        <p:txBody>
-          <a:bodyPr/>
-          <a:lstStyle/>
-          <a:p>
-            <a:r>
-              <a:t>Riley Patel | Lead | IT</a:t>
-            </a:r>
-          </a:p>
-          <a:p>
-            <a:r>
-              <a:t>Prepared: 2025-03-10</a:t>
+            <p:ph type="title"/>
+          </p:nvPr>
+        </p:nvSpPr>
+        <p:spPr/>
+        <p:txBody>
+          <a:bodyPr/>
+          <a:lstStyle/>
+          <a:p>
+            <a:r>
+              <a:t>Ast Emp067 01 - EMP067</a:t>
+            </a:r>
+          </a:p>
+        </p:txBody>
+      </p:sp>
+      <p:sp>
+        <p:nvSpPr>
+          <p:cNvPr id="3" name="Content Placeholder 2"/>
+          <p:cNvSpPr>
+            <a:spLocks noGrp="1"/>
+          </p:cNvSpPr>
+          <p:nvPr>
+            <p:ph idx="1"/>
+          </p:nvPr>
+        </p:nvSpPr>
+        <p:spPr/>
+        <p:txBody>
+          <a:bodyPr/>
+          <a:lstStyle/>
+          <a:p>
+            <a:r>
+              <a:t>Slide 1: Executive Summary</a:t>
+            </a:r>
+          </a:p>
+          <a:p>
+            <a:pPr lvl="1"/>
+            <a:r>
+              <a:t>Section 1: Automation backlog refinement. EMP067 contributes to ast emp067 01 through recurring collaboration, clear ownership boundaries, and measurable outcomes. The team captures decisions, open issues, and handoffs so that knowledge remains discoverable for future programs.</a:t>
+            </a:r>
+          </a:p>
+          <a:p>
+            <a:pPr lvl="1"/>
+            <a:r>
+              <a:t>Section 2: Data quality remediation. EMP067 contributes to ast emp067 01 through recurring collaboration, clear ownership boundaries, and measurable outcomes. The team captures decisions, open issues, and handoffs so that knowledge remains discoverable for future programs.</a:t>
+            </a:r>
+          </a:p>
+          <a:p>
+            <a:pPr lvl="1"/>
+            <a:r>
+              <a:t>Section 3: Quarterly delivery milestones. EMP067 contributes to ast emp067 01 through recurring collaboration, clear ownership boundaries, and measurable outcomes. The team captures decisions, open issues, and handoffs so that knowledge remains discoverable for future programs.</a:t>
             </a:r>
           </a:p>
         </p:txBody>
@@ -3172,7 +3186,7 @@
           <a:lstStyle/>
           <a:p>
             <a:r>
-              <a:t>Infrastructure Utilisation Dashboard</a:t>
+              <a:t>Ast Emp067 01 - EMP067</a:t>
             </a:r>
           </a:p>
         </p:txBody>
@@ -3193,17 +3207,25 @@
           <a:lstStyle/>
           <a:p>
             <a:r>
-              <a:t>Overview of Infrastructure Utilisation Dashboard for IT department.</a:t>
-            </a:r>
-          </a:p>
-          <a:p>
-            <a:r>
-              <a:t>Responsible: Riley Patel (Lead)</a:t>
-            </a:r>
-          </a:p>
-          <a:p>
-            <a:r>
-              <a:t>Location: Austin | Skills: TypeScript, MLOps, Python, Kusto</a:t>
+              <a:t>Slide 2: Executive Summary</a:t>
+            </a:r>
+          </a:p>
+          <a:p>
+            <a:pPr lvl="1"/>
+            <a:r>
+              <a:t>Section 1: Fabric semantic model planning. EMP067 contributes to ast emp067 01 through recurring collaboration, clear ownership boundaries, and measurable outcomes. The team captures decisions, open issues, and handoffs so that knowledge remains discoverable for future programs.</a:t>
+            </a:r>
+          </a:p>
+          <a:p>
+            <a:pPr lvl="1"/>
+            <a:r>
+              <a:t>Section 2: Department KPI performance. EMP067 contributes to ast emp067 01 through recurring collaboration, clear ownership boundaries, and measurable outcomes. The team captures decisions, open issues, and handoffs so that knowledge remains discoverable for future programs.</a:t>
+            </a:r>
+          </a:p>
+          <a:p>
+            <a:pPr lvl="1"/>
+            <a:r>
+              <a:t>Section 3: Data quality remediation. EMP067 contributes to ast emp067 01 through recurring collaboration, clear ownership boundaries, and measurable outcomes. The team captures decisions, open issues, and handoffs so that knowledge remains discoverable for future programs.</a:t>
             </a:r>
           </a:p>
         </p:txBody>
@@ -3242,7 +3264,7 @@
           <a:lstStyle/>
           <a:p>
             <a:r>
-              <a:t>Security Patch Status</a:t>
+              <a:t>Ast Emp067 01 - EMP067</a:t>
             </a:r>
           </a:p>
         </p:txBody>
@@ -3263,17 +3285,25 @@
           <a:lstStyle/>
           <a:p>
             <a:r>
-              <a:t>Overview of Security Patch Status for IT department.</a:t>
-            </a:r>
-          </a:p>
-          <a:p>
-            <a:r>
-              <a:t>Responsible: Riley Patel (Lead)</a:t>
-            </a:r>
-          </a:p>
-          <a:p>
-            <a:r>
-              <a:t>Location: Austin | Skills: TypeScript, MLOps, Python, Kusto</a:t>
+              <a:t>Slide 3: Executive Summary</a:t>
+            </a:r>
+          </a:p>
+          <a:p>
+            <a:pPr lvl="1"/>
+            <a:r>
+              <a:t>Section 1: Knowledge transfer and onboarding. EMP067 contributes to ast emp067 01 through recurring collaboration, clear ownership boundaries, and measurable outcomes. The team captures decisions, open issues, and handoffs so that knowledge remains discoverable for future programs.</a:t>
+            </a:r>
+          </a:p>
+          <a:p>
+            <a:pPr lvl="1"/>
+            <a:r>
+              <a:t>Section 2: Fabric semantic model planning. EMP067 contributes to ast emp067 01 through recurring collaboration, clear ownership boundaries, and measurable outcomes. The team captures decisions, open issues, and handoffs so that knowledge remains discoverable for future programs.</a:t>
+            </a:r>
+          </a:p>
+          <a:p>
+            <a:pPr lvl="1"/>
+            <a:r>
+              <a:t>Section 3: Operational risk review. EMP067 contributes to ast emp067 01 through recurring collaboration, clear ownership boundaries, and measurable outcomes. The team captures decisions, open issues, and handoffs so that knowledge remains discoverable for future programs.</a:t>
             </a:r>
           </a:p>
         </p:txBody>
@@ -3312,7 +3342,7 @@
           <a:lstStyle/>
           <a:p>
             <a:r>
-              <a:t>Cloud Cost Optimisation</a:t>
+              <a:t>Ast Emp067 01 - EMP067</a:t>
             </a:r>
           </a:p>
         </p:txBody>
@@ -3333,17 +3363,103 @@
           <a:lstStyle/>
           <a:p>
             <a:r>
-              <a:t>Overview of Cloud Cost Optimisation for IT department.</a:t>
-            </a:r>
-          </a:p>
-          <a:p>
-            <a:r>
-              <a:t>Responsible: Riley Patel (Lead)</a:t>
-            </a:r>
-          </a:p>
-          <a:p>
-            <a:r>
-              <a:t>Location: Austin | Skills: TypeScript, MLOps, Python, Kusto</a:t>
+              <a:t>Slide 4: Executive Summary</a:t>
+            </a:r>
+          </a:p>
+          <a:p>
+            <a:pPr lvl="1"/>
+            <a:r>
+              <a:t>Section 1: Automation backlog refinement. EMP067 contributes to ast emp067 01 through recurring collaboration, clear ownership boundaries, and measurable outcomes. The team captures decisions, open issues, and handoffs so that knowledge remains discoverable for future programs.</a:t>
+            </a:r>
+          </a:p>
+          <a:p>
+            <a:pPr lvl="1"/>
+            <a:r>
+              <a:t>Section 2: Data quality remediation. EMP067 contributes to ast emp067 01 through recurring collaboration, clear ownership boundaries, and measurable outcomes. The team captures decisions, open issues, and handoffs so that knowledge remains discoverable for future programs.</a:t>
+            </a:r>
+          </a:p>
+          <a:p>
+            <a:pPr lvl="1"/>
+            <a:r>
+              <a:t>Section 3: Fabric semantic model planning. EMP067 contributes to ast emp067 01 through recurring collaboration, clear ownership boundaries, and measurable outcomes. The team captures decisions, open issues, and handoffs so that knowledge remains discoverable for future programs.</a:t>
+            </a:r>
+          </a:p>
+        </p:txBody>
+      </p:sp>
+    </p:spTree>
+  </p:cSld>
+  <p:clrMapOvr>
+    <a:masterClrMapping/>
+  </p:clrMapOvr>
+</p:sld>
+</file>
+
+<file path=ppt/slides/slide5.xml><?xml version="1.0" encoding="utf-8"?>
+<p:sld xmlns:a="http://schemas.openxmlformats.org/drawingml/2006/main" xmlns:p="http://schemas.openxmlformats.org/presentationml/2006/main" xmlns:r="http://schemas.openxmlformats.org/officeDocument/2006/relationships">
+  <p:cSld>
+    <p:spTree>
+      <p:nvGrpSpPr>
+        <p:cNvPr id="1" name=""/>
+        <p:cNvGrpSpPr/>
+        <p:nvPr/>
+      </p:nvGrpSpPr>
+      <p:grpSpPr/>
+      <p:sp>
+        <p:nvSpPr>
+          <p:cNvPr id="2" name="Title 1"/>
+          <p:cNvSpPr>
+            <a:spLocks noGrp="1"/>
+          </p:cNvSpPr>
+          <p:nvPr>
+            <p:ph type="title"/>
+          </p:nvPr>
+        </p:nvSpPr>
+        <p:spPr/>
+        <p:txBody>
+          <a:bodyPr/>
+          <a:lstStyle/>
+          <a:p>
+            <a:r>
+              <a:t>Ast Emp067 01 - EMP067</a:t>
+            </a:r>
+          </a:p>
+        </p:txBody>
+      </p:sp>
+      <p:sp>
+        <p:nvSpPr>
+          <p:cNvPr id="3" name="Content Placeholder 2"/>
+          <p:cNvSpPr>
+            <a:spLocks noGrp="1"/>
+          </p:cNvSpPr>
+          <p:nvPr>
+            <p:ph idx="1"/>
+          </p:nvPr>
+        </p:nvSpPr>
+        <p:spPr/>
+        <p:txBody>
+          <a:bodyPr/>
+          <a:lstStyle/>
+          <a:p>
+            <a:r>
+              <a:t>Slide 5: Executive Summary</a:t>
+            </a:r>
+          </a:p>
+          <a:p>
+            <a:pPr lvl="1"/>
+            <a:r>
+              <a:t>Section 1: Fabric semantic model planning. EMP067 contributes to ast emp067 01 through recurring collaboration, clear ownership boundaries, and measurable outcomes. The team captures decisions, open issues, and handoffs so that knowledge remains discoverable for future programs.</a:t>
+            </a:r>
+          </a:p>
+          <a:p>
+            <a:pPr lvl="1"/>
+            <a:r>
+              <a:t>Section 2: Quarterly delivery milestones. EMP067 contributes to ast emp067 01 through recurring collaboration, clear ownership boundaries, and measurable outcomes. The team captures decisions, open issues, and handoffs so that knowledge remains discoverable for future programs.</a:t>
+            </a:r>
+          </a:p>
+          <a:p>
+            <a:pPr lvl="1"/>
+            <a:r>
+              <a:t>Section 3: Data quality remediation. EMP067 contributes to ast emp067 01 through recurring collaboration, clear ownership boundaries, and measurable outcomes. The team captures decisions, open issues, and handoffs so that knowledge remains discoverable for future programs.</a:t>
             </a:r>
           </a:p>
         </p:txBody>
